--- a/classes/parte-2-deep-learning/137-lstm-gru/clase-137-lstm-gru-presentacion.pptx
+++ b/classes/parte-2-deep-learning/137-lstm-gru/clase-137-lstm-gru-presentacion.pptx
@@ -4910,7 +4910,178 @@
                 </a:solidFill>
                 <a:latin typeface="Courier New"/>
               </a:rPr>
-              <a:t># Imports y configuración inicial</a:t>
+              <a:t>import numpy as np</a:t>
+            </a:r>
+          </a:p>
+          <a:p>
+            <a:pPr>
+              <a:defRPr sz="1200" b="0">
+                <a:solidFill>
+                  <a:srgbClr val="F8FAFC"/>
+                </a:solidFill>
+                <a:latin typeface="Courier New"/>
+              </a:defRPr>
+            </a:pPr>
+            <a:r>
+              <a:rPr sz="1200" b="0">
+                <a:solidFill>
+                  <a:srgbClr val="F8FAFC"/>
+                </a:solidFill>
+                <a:latin typeface="Courier New"/>
+              </a:rPr>
+              <a:t>from tensorflow import keras</a:t>
+            </a:r>
+          </a:p>
+          <a:p>
+            <a:pPr>
+              <a:defRPr sz="1200" b="0">
+                <a:solidFill>
+                  <a:srgbClr val="F8FAFC"/>
+                </a:solidFill>
+                <a:latin typeface="Courier New"/>
+              </a:defRPr>
+            </a:pPr>
+            <a:r>
+              <a:rPr sz="1200" b="0">
+                <a:solidFill>
+                  <a:srgbClr val="F8FAFC"/>
+                </a:solidFill>
+                <a:latin typeface="Courier New"/>
+              </a:rPr>
+              <a:t>from tensorflow.keras import layers</a:t>
+            </a:r>
+          </a:p>
+          <a:p>
+            <a:pPr>
+              <a:defRPr sz="1200" b="0">
+                <a:solidFill>
+                  <a:srgbClr val="F8FAFC"/>
+                </a:solidFill>
+                <a:latin typeface="Courier New"/>
+              </a:defRPr>
+            </a:pPr>
+            <a:r>
+              <a:rPr sz="1200" b="0">
+                <a:solidFill>
+                  <a:srgbClr val="F8FAFC"/>
+                </a:solidFill>
+                <a:latin typeface="Courier New"/>
+              </a:rPr>
+              <a:t>keras.utils.set_random_seed(42)</a:t>
+            </a:r>
+          </a:p>
+          <a:p>
+            <a:pPr>
+              <a:defRPr sz="1200" b="0">
+                <a:solidFill>
+                  <a:srgbClr val="F8FAFC"/>
+                </a:solidFill>
+                <a:latin typeface="Courier New"/>
+              </a:defRPr>
+            </a:pPr>
+            <a:r>
+              <a:rPr sz="1200" b="0">
+                <a:solidFill>
+                  <a:srgbClr val="F8FAFC"/>
+                </a:solidFill>
+                <a:latin typeface="Courier New"/>
+              </a:rPr>
+              <a:t># El target depende del PRIMER y del ÚLTIMO paso -&gt; requiere memoria a 100 pasos</a:t>
+            </a:r>
+          </a:p>
+          <a:p>
+            <a:pPr>
+              <a:defRPr sz="1200" b="0">
+                <a:solidFill>
+                  <a:srgbClr val="F8FAFC"/>
+                </a:solidFill>
+                <a:latin typeface="Courier New"/>
+              </a:defRPr>
+            </a:pPr>
+            <a:r>
+              <a:rPr sz="1200" b="0">
+                <a:solidFill>
+                  <a:srgbClr val="F8FAFC"/>
+                </a:solidFill>
+                <a:latin typeface="Courier New"/>
+              </a:rPr>
+              <a:t>T, F = 100, 1</a:t>
+            </a:r>
+          </a:p>
+          <a:p>
+            <a:pPr>
+              <a:defRPr sz="1200" b="0">
+                <a:solidFill>
+                  <a:srgbClr val="F8FAFC"/>
+                </a:solidFill>
+                <a:latin typeface="Courier New"/>
+              </a:defRPr>
+            </a:pPr>
+            <a:r>
+              <a:rPr sz="1200" b="0">
+                <a:solidFill>
+                  <a:srgbClr val="F8FAFC"/>
+                </a:solidFill>
+                <a:latin typeface="Courier New"/>
+              </a:rPr>
+              <a:t>r = np.random.default_rng(42)</a:t>
+            </a:r>
+          </a:p>
+          <a:p>
+            <a:pPr>
+              <a:defRPr sz="1200" b="0">
+                <a:solidFill>
+                  <a:srgbClr val="F8FAFC"/>
+                </a:solidFill>
+                <a:latin typeface="Courier New"/>
+              </a:defRPr>
+            </a:pPr>
+            <a:r>
+              <a:rPr sz="1200" b="0">
+                <a:solidFill>
+                  <a:srgbClr val="F8FAFC"/>
+                </a:solidFill>
+                <a:latin typeface="Courier New"/>
+              </a:rPr>
+              <a:t>X = r.standard_normal((2000, T, F)).astype("float32")</a:t>
+            </a:r>
+          </a:p>
+          <a:p>
+            <a:pPr>
+              <a:defRPr sz="1200" b="0">
+                <a:solidFill>
+                  <a:srgbClr val="F8FAFC"/>
+                </a:solidFill>
+                <a:latin typeface="Courier New"/>
+              </a:defRPr>
+            </a:pPr>
+            <a:r>
+              <a:rPr sz="1200" b="0">
+                <a:solidFill>
+                  <a:srgbClr val="F8FAFC"/>
+                </a:solidFill>
+                <a:latin typeface="Courier New"/>
+              </a:rPr>
+              <a:t>y = ((X[:, 0, 0] + X[:, -1, 0]) &gt; 0).astype("float32")</a:t>
+            </a:r>
+          </a:p>
+          <a:p>
+            <a:pPr>
+              <a:defRPr sz="1200" b="0">
+                <a:solidFill>
+                  <a:srgbClr val="F8FAFC"/>
+                </a:solidFill>
+                <a:latin typeface="Courier New"/>
+              </a:defRPr>
+            </a:pPr>
+            <a:r>
+              <a:rPr sz="1200" b="0">
+                <a:solidFill>
+                  <a:srgbClr val="F8FAFC"/>
+                </a:solidFill>
+                <a:latin typeface="Courier New"/>
+              </a:rPr>
+              <a:t>print("X:", X.shape, "| balance de clases:", round(float(y.mean()), 3))</a:t>
             </a:r>
           </a:p>
         </p:txBody>

--- a/classes/parte-2-deep-learning/137-lstm-gru/clase-137-lstm-gru-presentacion.pptx
+++ b/classes/parte-2-deep-learning/137-lstm-gru/clase-137-lstm-gru-presentacion.pptx
@@ -3272,7 +3272,7 @@
                 </a:solidFill>
                 <a:latin typeface="Segoe UI"/>
               </a:rPr>
-              <a:t>Parte: 2 — Deep Learning · Fuente: Géron, cap. 15 § Tackling Short-Term Memory Problems.  Duración estimada: 70 min.</a:t>
+              <a:t>Parte: 2 — Deep Learning · Fuente: Géron, cap. 15 § Tackling Short-Term Memory Problems.  Duración estimada: 70 min. · Nivel: Avanzado</a:t>
             </a:r>
           </a:p>
         </p:txBody>
@@ -3581,7 +3581,7 @@
                 </a:solidFill>
                 <a:latin typeface="Segoe UI"/>
               </a:rPr>
-              <a:t>Parte: 2 — Deep Learning · Fuente: Géron, cap. 15 § Tackling Short-Term Memory Problems.  Duración estimada: 70 min.</a:t>
+              <a:t>Parte: 2 — Deep Learning · Fuente: Géron, cap. 15 § Tackling Short-Term Memory Problems.  Duración estimada: 70 min. · Nivel: Avanzado</a:t>
             </a:r>
           </a:p>
         </p:txBody>
